--- a/eval/out/gates_slide2.pptx
+++ b/eval/out/gates_slide2.pptx
@@ -3081,6 +3081,14 @@
 <file path=ppt/slides/slide1.xml><?xml version="1.0" encoding="utf-8"?>
 <p:sld xmlns:a="http://schemas.openxmlformats.org/drawingml/2006/main" xmlns:p="http://schemas.openxmlformats.org/presentationml/2006/main" xmlns:r="http://schemas.openxmlformats.org/officeDocument/2006/relationships">
   <p:cSld>
+    <p:bg>
+      <p:bgPr>
+        <a:solidFill>
+          <a:srgbClr val="FFFFFF"/>
+        </a:solidFill>
+        <a:effectLst/>
+      </p:bgPr>
+    </p:bg>
     <p:spTree>
       <p:nvGrpSpPr>
         <p:cNvPr id="1" name=""/>

--- a/eval/out/gates_slide2.pptx
+++ b/eval/out/gates_slide2.pptx
@@ -3104,8 +3104,8 @@
         </p:nvSpPr>
         <p:spPr>
           <a:xfrm>
-            <a:off x="411480" y="518638"/>
-            <a:ext cx="11369040" cy="288603"/>
+            <a:off x="411480" y="274320"/>
+            <a:ext cx="11369040" cy="295818"/>
           </a:xfrm>
           <a:prstGeom prst="rect">
             <a:avLst/>
@@ -3120,7 +3120,7 @@
           <a:p>
             <a:pPr algn="l">
               <a:lnSpc>
-                <a:spcPts val="2272"/>
+                <a:spcPts val="2329"/>
               </a:lnSpc>
               <a:spcBef>
                 <a:spcPts val="0"/>
@@ -3257,8 +3257,8 @@
         </p:nvSpPr>
         <p:spPr>
           <a:xfrm>
-            <a:off x="1874520" y="1445380"/>
-            <a:ext cx="3277616" cy="188604"/>
+            <a:off x="1874520" y="1407816"/>
+            <a:ext cx="3277616" cy="192405"/>
           </a:xfrm>
           <a:prstGeom prst="rect">
             <a:avLst/>
@@ -3319,8 +3319,8 @@
         </p:nvSpPr>
         <p:spPr>
           <a:xfrm>
-            <a:off x="5188712" y="1445380"/>
-            <a:ext cx="3277616" cy="188604"/>
+            <a:off x="5188712" y="1407816"/>
+            <a:ext cx="3277616" cy="192405"/>
           </a:xfrm>
           <a:prstGeom prst="rect">
             <a:avLst/>
@@ -3381,8 +3381,8 @@
         </p:nvSpPr>
         <p:spPr>
           <a:xfrm>
-            <a:off x="8502904" y="1445380"/>
-            <a:ext cx="3277616" cy="188604"/>
+            <a:off x="8502904" y="1407816"/>
+            <a:ext cx="3277616" cy="192405"/>
           </a:xfrm>
           <a:prstGeom prst="rect">
             <a:avLst/>
@@ -3443,7 +3443,7 @@
         </p:nvSpPr>
         <p:spPr>
           <a:xfrm>
-            <a:off x="411480" y="1755891"/>
+            <a:off x="411480" y="1730046"/>
             <a:ext cx="1426464" cy="566928"/>
           </a:xfrm>
           <a:prstGeom prst="homePlate">
@@ -3479,7 +3479,7 @@
           <a:p>
             <a:pPr algn="ctr">
               <a:lnSpc>
-                <a:spcPts val="997"/>
+                <a:spcPts val="1022"/>
               </a:lnSpc>
               <a:spcBef>
                 <a:spcPts val="0"/>
@@ -3517,8 +3517,8 @@
         </p:nvSpPr>
         <p:spPr>
           <a:xfrm>
-            <a:off x="1874520" y="1670560"/>
-            <a:ext cx="1092539" cy="152028"/>
+            <a:off x="1874520" y="1636797"/>
+            <a:ext cx="1092539" cy="155829"/>
           </a:xfrm>
           <a:prstGeom prst="rect">
             <a:avLst/>
@@ -3533,7 +3533,7 @@
           <a:p>
             <a:pPr algn="ctr">
               <a:lnSpc>
-                <a:spcPts val="1197"/>
+                <a:spcPts val="1227"/>
               </a:lnSpc>
               <a:spcBef>
                 <a:spcPts val="0"/>
@@ -3562,8 +3562,8 @@
         </p:nvSpPr>
         <p:spPr>
           <a:xfrm>
-            <a:off x="1874520" y="1845448"/>
-            <a:ext cx="1092539" cy="228042"/>
+            <a:off x="1874520" y="1815486"/>
+            <a:ext cx="1092539" cy="233743"/>
           </a:xfrm>
           <a:prstGeom prst="rect">
             <a:avLst/>
@@ -3578,7 +3578,7 @@
           <a:p>
             <a:pPr algn="ctr">
               <a:lnSpc>
-                <a:spcPts val="1795"/>
+                <a:spcPts val="1840"/>
               </a:lnSpc>
               <a:spcBef>
                 <a:spcPts val="0"/>
@@ -3607,7 +3607,7 @@
         </p:nvCxnSpPr>
         <p:spPr>
           <a:xfrm>
-            <a:off x="2093028" y="2093556"/>
+            <a:off x="2093028" y="2069295"/>
             <a:ext cx="655523" cy="0"/>
           </a:xfrm>
           <a:prstGeom prst="line">
@@ -3642,8 +3642,8 @@
         </p:nvSpPr>
         <p:spPr>
           <a:xfrm>
-            <a:off x="2967059" y="1670560"/>
-            <a:ext cx="1092539" cy="152028"/>
+            <a:off x="2967059" y="1636797"/>
+            <a:ext cx="1092539" cy="155829"/>
           </a:xfrm>
           <a:prstGeom prst="rect">
             <a:avLst/>
@@ -3658,7 +3658,7 @@
           <a:p>
             <a:pPr algn="ctr">
               <a:lnSpc>
-                <a:spcPts val="1197"/>
+                <a:spcPts val="1227"/>
               </a:lnSpc>
               <a:spcBef>
                 <a:spcPts val="0"/>
@@ -3687,8 +3687,8 @@
         </p:nvSpPr>
         <p:spPr>
           <a:xfrm>
-            <a:off x="2967059" y="1845448"/>
-            <a:ext cx="1092539" cy="228042"/>
+            <a:off x="2967059" y="1815486"/>
+            <a:ext cx="1092539" cy="233743"/>
           </a:xfrm>
           <a:prstGeom prst="rect">
             <a:avLst/>
@@ -3703,7 +3703,7 @@
           <a:p>
             <a:pPr algn="ctr">
               <a:lnSpc>
-                <a:spcPts val="1795"/>
+                <a:spcPts val="1840"/>
               </a:lnSpc>
               <a:spcBef>
                 <a:spcPts val="0"/>
@@ -3732,7 +3732,7 @@
         </p:nvCxnSpPr>
         <p:spPr>
           <a:xfrm>
-            <a:off x="3185567" y="2093556"/>
+            <a:off x="3185567" y="2069295"/>
             <a:ext cx="655523" cy="0"/>
           </a:xfrm>
           <a:prstGeom prst="line">
@@ -3767,8 +3767,8 @@
         </p:nvSpPr>
         <p:spPr>
           <a:xfrm>
-            <a:off x="4059598" y="1670560"/>
-            <a:ext cx="1092538" cy="152028"/>
+            <a:off x="4059598" y="1636797"/>
+            <a:ext cx="1092538" cy="155829"/>
           </a:xfrm>
           <a:prstGeom prst="rect">
             <a:avLst/>
@@ -3783,7 +3783,7 @@
           <a:p>
             <a:pPr algn="ctr">
               <a:lnSpc>
-                <a:spcPts val="1197"/>
+                <a:spcPts val="1227"/>
               </a:lnSpc>
               <a:spcBef>
                 <a:spcPts val="0"/>
@@ -3812,8 +3812,8 @@
         </p:nvSpPr>
         <p:spPr>
           <a:xfrm>
-            <a:off x="4059598" y="1845448"/>
-            <a:ext cx="1092538" cy="228042"/>
+            <a:off x="4059598" y="1815486"/>
+            <a:ext cx="1092538" cy="233743"/>
           </a:xfrm>
           <a:prstGeom prst="rect">
             <a:avLst/>
@@ -3828,7 +3828,7 @@
           <a:p>
             <a:pPr algn="ctr">
               <a:lnSpc>
-                <a:spcPts val="1795"/>
+                <a:spcPts val="1840"/>
               </a:lnSpc>
               <a:spcBef>
                 <a:spcPts val="0"/>
@@ -3857,7 +3857,7 @@
         </p:nvCxnSpPr>
         <p:spPr>
           <a:xfrm>
-            <a:off x="4278105" y="2093556"/>
+            <a:off x="4278105" y="2069295"/>
             <a:ext cx="655523" cy="0"/>
           </a:xfrm>
           <a:prstGeom prst="line">
@@ -3892,8 +3892,8 @@
         </p:nvSpPr>
         <p:spPr>
           <a:xfrm>
-            <a:off x="5188712" y="1670560"/>
-            <a:ext cx="1092539" cy="152028"/>
+            <a:off x="5188712" y="1636797"/>
+            <a:ext cx="1092539" cy="155829"/>
           </a:xfrm>
           <a:prstGeom prst="rect">
             <a:avLst/>
@@ -3908,7 +3908,7 @@
           <a:p>
             <a:pPr algn="ctr">
               <a:lnSpc>
-                <a:spcPts val="1197"/>
+                <a:spcPts val="1227"/>
               </a:lnSpc>
               <a:spcBef>
                 <a:spcPts val="0"/>
@@ -3937,8 +3937,8 @@
         </p:nvSpPr>
         <p:spPr>
           <a:xfrm>
-            <a:off x="5188712" y="1845448"/>
-            <a:ext cx="1092539" cy="228042"/>
+            <a:off x="5188712" y="1815486"/>
+            <a:ext cx="1092539" cy="233743"/>
           </a:xfrm>
           <a:prstGeom prst="rect">
             <a:avLst/>
@@ -3953,7 +3953,7 @@
           <a:p>
             <a:pPr algn="ctr">
               <a:lnSpc>
-                <a:spcPts val="1795"/>
+                <a:spcPts val="1840"/>
               </a:lnSpc>
               <a:spcBef>
                 <a:spcPts val="0"/>
@@ -3982,7 +3982,7 @@
         </p:nvCxnSpPr>
         <p:spPr>
           <a:xfrm>
-            <a:off x="5407220" y="2093556"/>
+            <a:off x="5407220" y="2069295"/>
             <a:ext cx="655523" cy="0"/>
           </a:xfrm>
           <a:prstGeom prst="line">
@@ -4017,8 +4017,8 @@
         </p:nvSpPr>
         <p:spPr>
           <a:xfrm>
-            <a:off x="6281251" y="1670560"/>
-            <a:ext cx="1092539" cy="152028"/>
+            <a:off x="6281251" y="1636797"/>
+            <a:ext cx="1092539" cy="155829"/>
           </a:xfrm>
           <a:prstGeom prst="rect">
             <a:avLst/>
@@ -4033,7 +4033,7 @@
           <a:p>
             <a:pPr algn="ctr">
               <a:lnSpc>
-                <a:spcPts val="1197"/>
+                <a:spcPts val="1227"/>
               </a:lnSpc>
               <a:spcBef>
                 <a:spcPts val="0"/>
@@ -4062,8 +4062,8 @@
         </p:nvSpPr>
         <p:spPr>
           <a:xfrm>
-            <a:off x="6281251" y="1845448"/>
-            <a:ext cx="1092539" cy="228042"/>
+            <a:off x="6281251" y="1815486"/>
+            <a:ext cx="1092539" cy="233743"/>
           </a:xfrm>
           <a:prstGeom prst="rect">
             <a:avLst/>
@@ -4078,7 +4078,7 @@
           <a:p>
             <a:pPr algn="ctr">
               <a:lnSpc>
-                <a:spcPts val="1795"/>
+                <a:spcPts val="1840"/>
               </a:lnSpc>
               <a:spcBef>
                 <a:spcPts val="0"/>
@@ -4107,7 +4107,7 @@
         </p:nvCxnSpPr>
         <p:spPr>
           <a:xfrm>
-            <a:off x="6499759" y="2093556"/>
+            <a:off x="6499759" y="2069295"/>
             <a:ext cx="655523" cy="0"/>
           </a:xfrm>
           <a:prstGeom prst="line">
@@ -4142,8 +4142,8 @@
         </p:nvSpPr>
         <p:spPr>
           <a:xfrm>
-            <a:off x="7373790" y="1670560"/>
-            <a:ext cx="1092538" cy="152028"/>
+            <a:off x="7373790" y="1636797"/>
+            <a:ext cx="1092538" cy="155829"/>
           </a:xfrm>
           <a:prstGeom prst="rect">
             <a:avLst/>
@@ -4158,7 +4158,7 @@
           <a:p>
             <a:pPr algn="ctr">
               <a:lnSpc>
-                <a:spcPts val="1197"/>
+                <a:spcPts val="1227"/>
               </a:lnSpc>
               <a:spcBef>
                 <a:spcPts val="0"/>
@@ -4187,8 +4187,8 @@
         </p:nvSpPr>
         <p:spPr>
           <a:xfrm>
-            <a:off x="7373790" y="1845448"/>
-            <a:ext cx="1092538" cy="228042"/>
+            <a:off x="7373790" y="1815486"/>
+            <a:ext cx="1092538" cy="233743"/>
           </a:xfrm>
           <a:prstGeom prst="rect">
             <a:avLst/>
@@ -4203,7 +4203,7 @@
           <a:p>
             <a:pPr algn="ctr">
               <a:lnSpc>
-                <a:spcPts val="1795"/>
+                <a:spcPts val="1840"/>
               </a:lnSpc>
               <a:spcBef>
                 <a:spcPts val="0"/>
@@ -4232,7 +4232,7 @@
         </p:nvCxnSpPr>
         <p:spPr>
           <a:xfrm>
-            <a:off x="7592297" y="2093556"/>
+            <a:off x="7592297" y="2069295"/>
             <a:ext cx="655523" cy="0"/>
           </a:xfrm>
           <a:prstGeom prst="line">
@@ -4267,8 +4267,8 @@
         </p:nvSpPr>
         <p:spPr>
           <a:xfrm>
-            <a:off x="8502904" y="1670560"/>
-            <a:ext cx="1092539" cy="152028"/>
+            <a:off x="8502904" y="1636797"/>
+            <a:ext cx="1092539" cy="155829"/>
           </a:xfrm>
           <a:prstGeom prst="rect">
             <a:avLst/>
@@ -4283,7 +4283,7 @@
           <a:p>
             <a:pPr algn="ctr">
               <a:lnSpc>
-                <a:spcPts val="1197"/>
+                <a:spcPts val="1227"/>
               </a:lnSpc>
               <a:spcBef>
                 <a:spcPts val="0"/>
@@ -4312,8 +4312,8 @@
         </p:nvSpPr>
         <p:spPr>
           <a:xfrm>
-            <a:off x="8502904" y="1845448"/>
-            <a:ext cx="1092539" cy="228042"/>
+            <a:off x="8502904" y="1815486"/>
+            <a:ext cx="1092539" cy="233743"/>
           </a:xfrm>
           <a:prstGeom prst="rect">
             <a:avLst/>
@@ -4328,7 +4328,7 @@
           <a:p>
             <a:pPr algn="ctr">
               <a:lnSpc>
-                <a:spcPts val="1795"/>
+                <a:spcPts val="1840"/>
               </a:lnSpc>
               <a:spcBef>
                 <a:spcPts val="0"/>
@@ -4357,7 +4357,7 @@
         </p:nvCxnSpPr>
         <p:spPr>
           <a:xfrm>
-            <a:off x="8721412" y="2093556"/>
+            <a:off x="8721412" y="2069295"/>
             <a:ext cx="655523" cy="0"/>
           </a:xfrm>
           <a:prstGeom prst="line">
@@ -4392,8 +4392,8 @@
         </p:nvSpPr>
         <p:spPr>
           <a:xfrm>
-            <a:off x="9595443" y="1670560"/>
-            <a:ext cx="1092539" cy="152028"/>
+            <a:off x="9595443" y="1636797"/>
+            <a:ext cx="1092539" cy="155829"/>
           </a:xfrm>
           <a:prstGeom prst="rect">
             <a:avLst/>
@@ -4408,7 +4408,7 @@
           <a:p>
             <a:pPr algn="ctr">
               <a:lnSpc>
-                <a:spcPts val="1197"/>
+                <a:spcPts val="1227"/>
               </a:lnSpc>
               <a:spcBef>
                 <a:spcPts val="0"/>
@@ -4437,8 +4437,8 @@
         </p:nvSpPr>
         <p:spPr>
           <a:xfrm>
-            <a:off x="9595443" y="1845448"/>
-            <a:ext cx="1092539" cy="228042"/>
+            <a:off x="9595443" y="1815486"/>
+            <a:ext cx="1092539" cy="233743"/>
           </a:xfrm>
           <a:prstGeom prst="rect">
             <a:avLst/>
@@ -4453,7 +4453,7 @@
           <a:p>
             <a:pPr algn="ctr">
               <a:lnSpc>
-                <a:spcPts val="1795"/>
+                <a:spcPts val="1840"/>
               </a:lnSpc>
               <a:spcBef>
                 <a:spcPts val="0"/>
@@ -4482,7 +4482,7 @@
         </p:nvCxnSpPr>
         <p:spPr>
           <a:xfrm>
-            <a:off x="9813951" y="2093556"/>
+            <a:off x="9813951" y="2069295"/>
             <a:ext cx="655523" cy="0"/>
           </a:xfrm>
           <a:prstGeom prst="line">
@@ -4517,8 +4517,8 @@
         </p:nvSpPr>
         <p:spPr>
           <a:xfrm>
-            <a:off x="10687982" y="1670560"/>
-            <a:ext cx="1092538" cy="152028"/>
+            <a:off x="10687982" y="1636797"/>
+            <a:ext cx="1092538" cy="155829"/>
           </a:xfrm>
           <a:prstGeom prst="rect">
             <a:avLst/>
@@ -4533,7 +4533,7 @@
           <a:p>
             <a:pPr algn="ctr">
               <a:lnSpc>
-                <a:spcPts val="1197"/>
+                <a:spcPts val="1227"/>
               </a:lnSpc>
               <a:spcBef>
                 <a:spcPts val="0"/>
@@ -4562,8 +4562,8 @@
         </p:nvSpPr>
         <p:spPr>
           <a:xfrm>
-            <a:off x="10687982" y="1845448"/>
-            <a:ext cx="1092538" cy="228042"/>
+            <a:off x="10687982" y="1815486"/>
+            <a:ext cx="1092538" cy="233743"/>
           </a:xfrm>
           <a:prstGeom prst="rect">
             <a:avLst/>
@@ -4578,7 +4578,7 @@
           <a:p>
             <a:pPr algn="ctr">
               <a:lnSpc>
-                <a:spcPts val="1795"/>
+                <a:spcPts val="1840"/>
               </a:lnSpc>
               <a:spcBef>
                 <a:spcPts val="0"/>
@@ -4607,7 +4607,7 @@
         </p:nvCxnSpPr>
         <p:spPr>
           <a:xfrm>
-            <a:off x="10906489" y="2093556"/>
+            <a:off x="10906489" y="2069295"/>
             <a:ext cx="655523" cy="0"/>
           </a:xfrm>
           <a:prstGeom prst="line">
@@ -4642,7 +4642,7 @@
         </p:nvSpPr>
         <p:spPr>
           <a:xfrm>
-            <a:off x="411480" y="2547998"/>
+            <a:off x="411480" y="2538939"/>
             <a:ext cx="1426464" cy="566928"/>
           </a:xfrm>
           <a:prstGeom prst="homePlate">
@@ -4678,7 +4678,7 @@
           <a:p>
             <a:pPr algn="ctr">
               <a:lnSpc>
-                <a:spcPts val="997"/>
+                <a:spcPts val="1022"/>
               </a:lnSpc>
               <a:spcBef>
                 <a:spcPts val="0"/>
@@ -4716,8 +4716,8 @@
         </p:nvSpPr>
         <p:spPr>
           <a:xfrm>
-            <a:off x="1874520" y="2449298"/>
-            <a:ext cx="3277616" cy="456084"/>
+            <a:off x="1874520" y="2431371"/>
+            <a:ext cx="3277616" cy="467487"/>
           </a:xfrm>
           <a:prstGeom prst="rect">
             <a:avLst/>
@@ -4732,7 +4732,7 @@
           <a:p>
             <a:pPr algn="ctr">
               <a:lnSpc>
-                <a:spcPts val="1197"/>
+                <a:spcPts val="1227"/>
               </a:lnSpc>
               <a:spcBef>
                 <a:spcPts val="0"/>
@@ -4817,7 +4817,7 @@
           <a:p>
             <a:pPr algn="ctr">
               <a:lnSpc>
-                <a:spcPts val="1197"/>
+                <a:spcPts val="1227"/>
               </a:lnSpc>
               <a:spcBef>
                 <a:spcPts val="0"/>
@@ -4947,7 +4947,7 @@
           <a:p>
             <a:pPr algn="ctr">
               <a:lnSpc>
-                <a:spcPts val="1197"/>
+                <a:spcPts val="1227"/>
               </a:lnSpc>
               <a:spcBef>
                 <a:spcPts val="0"/>
@@ -4976,8 +4976,8 @@
         </p:nvSpPr>
         <p:spPr>
           <a:xfrm>
-            <a:off x="5188712" y="2449298"/>
-            <a:ext cx="3277616" cy="456084"/>
+            <a:off x="5188712" y="2431371"/>
+            <a:ext cx="3277616" cy="467487"/>
           </a:xfrm>
           <a:prstGeom prst="rect">
             <a:avLst/>
@@ -4992,7 +4992,7 @@
           <a:p>
             <a:pPr algn="ctr">
               <a:lnSpc>
-                <a:spcPts val="1197"/>
+                <a:spcPts val="1227"/>
               </a:lnSpc>
               <a:spcBef>
                 <a:spcPts val="0"/>
@@ -5077,7 +5077,7 @@
           <a:p>
             <a:pPr algn="ctr">
               <a:lnSpc>
-                <a:spcPts val="1197"/>
+                <a:spcPts val="1227"/>
               </a:lnSpc>
               <a:spcBef>
                 <a:spcPts val="0"/>
@@ -5207,7 +5207,7 @@
           <a:p>
             <a:pPr algn="ctr">
               <a:lnSpc>
-                <a:spcPts val="1197"/>
+                <a:spcPts val="1227"/>
               </a:lnSpc>
               <a:spcBef>
                 <a:spcPts val="0"/>
@@ -5236,8 +5236,8 @@
         </p:nvSpPr>
         <p:spPr>
           <a:xfrm>
-            <a:off x="8502904" y="2449298"/>
-            <a:ext cx="3277616" cy="456084"/>
+            <a:off x="8502904" y="2431371"/>
+            <a:ext cx="3277616" cy="467487"/>
           </a:xfrm>
           <a:prstGeom prst="rect">
             <a:avLst/>
@@ -5252,7 +5252,7 @@
           <a:p>
             <a:pPr algn="ctr">
               <a:lnSpc>
-                <a:spcPts val="1197"/>
+                <a:spcPts val="1227"/>
               </a:lnSpc>
               <a:spcBef>
                 <a:spcPts val="0"/>
@@ -5337,7 +5337,7 @@
           <a:p>
             <a:pPr algn="ctr">
               <a:lnSpc>
-                <a:spcPts val="1197"/>
+                <a:spcPts val="1227"/>
               </a:lnSpc>
               <a:spcBef>
                 <a:spcPts val="0"/>
@@ -5467,7 +5467,7 @@
           <a:p>
             <a:pPr algn="ctr">
               <a:lnSpc>
-                <a:spcPts val="1197"/>
+                <a:spcPts val="1227"/>
               </a:lnSpc>
               <a:spcBef>
                 <a:spcPts val="0"/>
@@ -5496,7 +5496,7 @@
         </p:nvSpPr>
         <p:spPr>
           <a:xfrm>
-            <a:off x="411480" y="3277460"/>
+            <a:off x="411480" y="3284238"/>
             <a:ext cx="1426464" cy="566928"/>
           </a:xfrm>
           <a:prstGeom prst="homePlate">
@@ -5532,7 +5532,7 @@
           <a:p>
             <a:pPr algn="ctr">
               <a:lnSpc>
-                <a:spcPts val="997"/>
+                <a:spcPts val="1022"/>
               </a:lnSpc>
               <a:spcBef>
                 <a:spcPts val="0"/>
@@ -5570,8 +5570,8 @@
         </p:nvSpPr>
         <p:spPr>
           <a:xfrm>
-            <a:off x="1874520" y="3254774"/>
-            <a:ext cx="3277616" cy="304056"/>
+            <a:off x="1874520" y="3254584"/>
+            <a:ext cx="3277616" cy="311658"/>
           </a:xfrm>
           <a:prstGeom prst="rect">
             <a:avLst/>
@@ -5586,7 +5586,7 @@
           <a:p>
             <a:pPr algn="ctr">
               <a:lnSpc>
-                <a:spcPts val="1197"/>
+                <a:spcPts val="1227"/>
               </a:lnSpc>
               <a:spcBef>
                 <a:spcPts val="0"/>
@@ -5707,7 +5707,7 @@
           <a:p>
             <a:pPr algn="ctr">
               <a:lnSpc>
-                <a:spcPts val="1197"/>
+                <a:spcPts val="1227"/>
               </a:lnSpc>
               <a:spcBef>
                 <a:spcPts val="0"/>
@@ -5781,8 +5781,8 @@
         </p:nvSpPr>
         <p:spPr>
           <a:xfrm>
-            <a:off x="5188712" y="3254774"/>
-            <a:ext cx="3277616" cy="304056"/>
+            <a:off x="5188712" y="3254584"/>
+            <a:ext cx="3277616" cy="311658"/>
           </a:xfrm>
           <a:prstGeom prst="rect">
             <a:avLst/>
@@ -5797,7 +5797,7 @@
           <a:p>
             <a:pPr algn="ctr">
               <a:lnSpc>
-                <a:spcPts val="1197"/>
+                <a:spcPts val="1227"/>
               </a:lnSpc>
               <a:spcBef>
                 <a:spcPts val="0"/>
@@ -5918,7 +5918,7 @@
           <a:p>
             <a:pPr algn="ctr">
               <a:lnSpc>
-                <a:spcPts val="1197"/>
+                <a:spcPts val="1227"/>
               </a:lnSpc>
               <a:spcBef>
                 <a:spcPts val="0"/>
@@ -5992,8 +5992,8 @@
         </p:nvSpPr>
         <p:spPr>
           <a:xfrm>
-            <a:off x="8502904" y="3254774"/>
-            <a:ext cx="3277616" cy="304056"/>
+            <a:off x="8502904" y="3254584"/>
+            <a:ext cx="3277616" cy="311658"/>
           </a:xfrm>
           <a:prstGeom prst="rect">
             <a:avLst/>
@@ -6008,7 +6008,7 @@
           <a:p>
             <a:pPr algn="ctr">
               <a:lnSpc>
-                <a:spcPts val="1197"/>
+                <a:spcPts val="1227"/>
               </a:lnSpc>
               <a:spcBef>
                 <a:spcPts val="0"/>
@@ -6129,7 +6129,7 @@
           <a:p>
             <a:pPr algn="ctr">
               <a:lnSpc>
-                <a:spcPts val="1197"/>
+                <a:spcPts val="1227"/>
               </a:lnSpc>
               <a:spcBef>
                 <a:spcPts val="0"/>
@@ -6203,7 +6203,7 @@
         </p:nvSpPr>
         <p:spPr>
           <a:xfrm>
-            <a:off x="411480" y="4087124"/>
+            <a:off x="411480" y="4110371"/>
             <a:ext cx="1426464" cy="566928"/>
           </a:xfrm>
           <a:prstGeom prst="homePlate">
@@ -6239,7 +6239,7 @@
           <a:p>
             <a:pPr algn="ctr">
               <a:lnSpc>
-                <a:spcPts val="997"/>
+                <a:spcPts val="1022"/>
               </a:lnSpc>
               <a:spcBef>
                 <a:spcPts val="0"/>
@@ -6279,7 +6279,7 @@
           <a:p>
             <a:pPr algn="ctr">
               <a:lnSpc>
-                <a:spcPts val="997"/>
+                <a:spcPts val="1022"/>
               </a:lnSpc>
               <a:spcBef>
                 <a:spcPts val="0"/>
@@ -6308,8 +6308,8 @@
         </p:nvSpPr>
         <p:spPr>
           <a:xfrm>
-            <a:off x="1874520" y="3908222"/>
-            <a:ext cx="819404" cy="154122"/>
+            <a:off x="1874520" y="3921968"/>
+            <a:ext cx="819404" cy="157289"/>
           </a:xfrm>
           <a:prstGeom prst="rect">
             <a:avLst/>
@@ -6339,14 +6339,14 @@
           </a:fontRef>
         </p:style>
         <p:txBody>
-          <a:bodyPr rtlCol="0" anchor="ctr" wrap="none" lIns="0" rIns="0" tIns="0" bIns="0">
+          <a:bodyPr rtlCol="0" anchor="ctr" wrap="none" lIns="22860" rIns="22860" tIns="0" bIns="0">
             <a:noAutofit/>
           </a:bodyPr>
           <a:lstStyle/>
           <a:p>
             <a:pPr algn="ctr">
               <a:lnSpc>
-                <a:spcPts val="997"/>
+                <a:spcPts val="1022"/>
               </a:lnSpc>
               <a:spcBef>
                 <a:spcPts val="0"/>
@@ -6375,8 +6375,8 @@
         </p:nvSpPr>
         <p:spPr>
           <a:xfrm>
-            <a:off x="2693924" y="3908222"/>
-            <a:ext cx="819404" cy="154122"/>
+            <a:off x="2693924" y="3921968"/>
+            <a:ext cx="819404" cy="157289"/>
           </a:xfrm>
           <a:prstGeom prst="rect">
             <a:avLst/>
@@ -6406,14 +6406,14 @@
           </a:fontRef>
         </p:style>
         <p:txBody>
-          <a:bodyPr rtlCol="0" anchor="ctr" wrap="none" lIns="0" rIns="0" tIns="0" bIns="0">
+          <a:bodyPr rtlCol="0" anchor="ctr" wrap="none" lIns="22860" rIns="22860" tIns="0" bIns="0">
             <a:noAutofit/>
           </a:bodyPr>
           <a:lstStyle/>
           <a:p>
             <a:pPr algn="ctr">
               <a:lnSpc>
-                <a:spcPts val="997"/>
+                <a:spcPts val="1022"/>
               </a:lnSpc>
               <a:spcBef>
                 <a:spcPts val="0"/>
@@ -6442,8 +6442,8 @@
         </p:nvSpPr>
         <p:spPr>
           <a:xfrm>
-            <a:off x="3513328" y="3908222"/>
-            <a:ext cx="819404" cy="154122"/>
+            <a:off x="3513328" y="3921968"/>
+            <a:ext cx="819404" cy="157289"/>
           </a:xfrm>
           <a:prstGeom prst="rect">
             <a:avLst/>
@@ -6473,14 +6473,14 @@
           </a:fontRef>
         </p:style>
         <p:txBody>
-          <a:bodyPr rtlCol="0" anchor="ctr" wrap="none" lIns="0" rIns="0" tIns="0" bIns="0">
+          <a:bodyPr rtlCol="0" anchor="ctr" wrap="none" lIns="22860" rIns="22860" tIns="0" bIns="0">
             <a:noAutofit/>
           </a:bodyPr>
           <a:lstStyle/>
           <a:p>
             <a:pPr algn="ctr">
               <a:lnSpc>
-                <a:spcPts val="997"/>
+                <a:spcPts val="1022"/>
               </a:lnSpc>
               <a:spcBef>
                 <a:spcPts val="0"/>
@@ -6496,7 +6496,16 @@
                 </a:solidFill>
                 <a:latin typeface="Segoe UI"/>
               </a:rPr>
-              <a:t>State Avg.</a:t>
+              <a:t>State </a:t>
+            </a:r>
+            <a:r>
+              <a:rPr sz="750" b="1" i="0">
+                <a:solidFill>
+                  <a:srgbClr val="3F3F3F"/>
+                </a:solidFill>
+                <a:latin typeface="Segoe UI"/>
+              </a:rPr>
+              <a:t>Avg.</a:t>
             </a:r>
           </a:p>
         </p:txBody>
@@ -6509,8 +6518,8 @@
         </p:nvSpPr>
         <p:spPr>
           <a:xfrm>
-            <a:off x="4332732" y="3908222"/>
-            <a:ext cx="819404" cy="154122"/>
+            <a:off x="4332732" y="3921968"/>
+            <a:ext cx="819404" cy="157289"/>
           </a:xfrm>
           <a:prstGeom prst="rect">
             <a:avLst/>
@@ -6540,14 +6549,14 @@
           </a:fontRef>
         </p:style>
         <p:txBody>
-          <a:bodyPr rtlCol="0" anchor="ctr" wrap="none" lIns="0" rIns="0" tIns="0" bIns="0">
+          <a:bodyPr rtlCol="0" anchor="ctr" wrap="none" lIns="22860" rIns="22860" tIns="0" bIns="0">
             <a:noAutofit/>
           </a:bodyPr>
           <a:lstStyle/>
           <a:p>
             <a:pPr algn="ctr">
               <a:lnSpc>
-                <a:spcPts val="997"/>
+                <a:spcPts val="1022"/>
               </a:lnSpc>
               <a:spcBef>
                 <a:spcPts val="0"/>
@@ -6576,8 +6585,8 @@
         </p:nvSpPr>
         <p:spPr>
           <a:xfrm>
-            <a:off x="1874520" y="4062344"/>
-            <a:ext cx="819404" cy="154122"/>
+            <a:off x="1874520" y="4079257"/>
+            <a:ext cx="819404" cy="157289"/>
           </a:xfrm>
           <a:prstGeom prst="rect">
             <a:avLst/>
@@ -6607,14 +6616,14 @@
           </a:fontRef>
         </p:style>
         <p:txBody>
-          <a:bodyPr rtlCol="0" anchor="ctr" wrap="none" lIns="0" rIns="0" tIns="0" bIns="0">
+          <a:bodyPr rtlCol="0" anchor="ctr" wrap="none" lIns="22860" rIns="22860" tIns="0" bIns="0">
             <a:noAutofit/>
           </a:bodyPr>
           <a:lstStyle/>
           <a:p>
             <a:pPr algn="ctr">
               <a:lnSpc>
-                <a:spcPts val="997"/>
+                <a:spcPts val="1022"/>
               </a:lnSpc>
               <a:spcBef>
                 <a:spcPts val="0"/>
@@ -6643,8 +6652,8 @@
         </p:nvSpPr>
         <p:spPr>
           <a:xfrm>
-            <a:off x="2693924" y="4062344"/>
-            <a:ext cx="819404" cy="154122"/>
+            <a:off x="2693924" y="4079257"/>
+            <a:ext cx="819404" cy="157289"/>
           </a:xfrm>
           <a:prstGeom prst="rect">
             <a:avLst/>
@@ -6674,14 +6683,14 @@
           </a:fontRef>
         </p:style>
         <p:txBody>
-          <a:bodyPr rtlCol="0" anchor="ctr" wrap="none" lIns="0" rIns="0" tIns="0" bIns="0">
+          <a:bodyPr rtlCol="0" anchor="ctr" wrap="none" lIns="22860" rIns="22860" tIns="0" bIns="0">
             <a:noAutofit/>
           </a:bodyPr>
           <a:lstStyle/>
           <a:p>
             <a:pPr algn="ctr">
               <a:lnSpc>
-                <a:spcPts val="997"/>
+                <a:spcPts val="1022"/>
               </a:lnSpc>
               <a:spcBef>
                 <a:spcPts val="0"/>
@@ -6710,8 +6719,8 @@
         </p:nvSpPr>
         <p:spPr>
           <a:xfrm>
-            <a:off x="3513328" y="4062344"/>
-            <a:ext cx="819404" cy="154122"/>
+            <a:off x="3513328" y="4079257"/>
+            <a:ext cx="819404" cy="157289"/>
           </a:xfrm>
           <a:prstGeom prst="rect">
             <a:avLst/>
@@ -6741,14 +6750,14 @@
           </a:fontRef>
         </p:style>
         <p:txBody>
-          <a:bodyPr rtlCol="0" anchor="ctr" wrap="none" lIns="0" rIns="0" tIns="0" bIns="0">
+          <a:bodyPr rtlCol="0" anchor="ctr" wrap="none" lIns="22860" rIns="22860" tIns="0" bIns="0">
             <a:noAutofit/>
           </a:bodyPr>
           <a:lstStyle/>
           <a:p>
             <a:pPr algn="ctr">
               <a:lnSpc>
-                <a:spcPts val="997"/>
+                <a:spcPts val="1022"/>
               </a:lnSpc>
               <a:spcBef>
                 <a:spcPts val="0"/>
@@ -6777,8 +6786,8 @@
         </p:nvSpPr>
         <p:spPr>
           <a:xfrm>
-            <a:off x="4332732" y="4062344"/>
-            <a:ext cx="819404" cy="154122"/>
+            <a:off x="4332732" y="4079257"/>
+            <a:ext cx="819404" cy="157289"/>
           </a:xfrm>
           <a:prstGeom prst="rect">
             <a:avLst/>
@@ -6808,14 +6817,14 @@
           </a:fontRef>
         </p:style>
         <p:txBody>
-          <a:bodyPr rtlCol="0" anchor="ctr" wrap="none" lIns="0" rIns="0" tIns="0" bIns="0">
+          <a:bodyPr rtlCol="0" anchor="ctr" wrap="none" lIns="22860" rIns="22860" tIns="0" bIns="0">
             <a:noAutofit/>
           </a:bodyPr>
           <a:lstStyle/>
           <a:p>
             <a:pPr algn="ctr">
               <a:lnSpc>
-                <a:spcPts val="997"/>
+                <a:spcPts val="1022"/>
               </a:lnSpc>
               <a:spcBef>
                 <a:spcPts val="0"/>
@@ -6831,7 +6840,16 @@
                 </a:solidFill>
                 <a:latin typeface="Segoe UI"/>
               </a:rPr>
-              <a:t>- 1</a:t>
+              <a:t>- </a:t>
+            </a:r>
+            <a:r>
+              <a:rPr sz="750" b="0" i="0">
+                <a:solidFill>
+                  <a:srgbClr val="3F3F3F"/>
+                </a:solidFill>
+                <a:latin typeface="Segoe UI"/>
+              </a:rPr>
+              <a:t>1</a:t>
             </a:r>
           </a:p>
         </p:txBody>
@@ -6844,8 +6862,8 @@
         </p:nvSpPr>
         <p:spPr>
           <a:xfrm>
-            <a:off x="1874520" y="4216466"/>
-            <a:ext cx="819404" cy="154122"/>
+            <a:off x="1874520" y="4236546"/>
+            <a:ext cx="819404" cy="157289"/>
           </a:xfrm>
           <a:prstGeom prst="rect">
             <a:avLst/>
@@ -6875,14 +6893,14 @@
           </a:fontRef>
         </p:style>
         <p:txBody>
-          <a:bodyPr rtlCol="0" anchor="ctr" wrap="none" lIns="0" rIns="0" tIns="0" bIns="0">
+          <a:bodyPr rtlCol="0" anchor="ctr" wrap="none" lIns="22860" rIns="22860" tIns="0" bIns="0">
             <a:noAutofit/>
           </a:bodyPr>
           <a:lstStyle/>
           <a:p>
             <a:pPr algn="ctr">
               <a:lnSpc>
-                <a:spcPts val="997"/>
+                <a:spcPts val="1022"/>
               </a:lnSpc>
               <a:spcBef>
                 <a:spcPts val="0"/>
@@ -6911,8 +6929,8 @@
         </p:nvSpPr>
         <p:spPr>
           <a:xfrm>
-            <a:off x="2693924" y="4216466"/>
-            <a:ext cx="819404" cy="154122"/>
+            <a:off x="2693924" y="4236546"/>
+            <a:ext cx="819404" cy="157289"/>
           </a:xfrm>
           <a:prstGeom prst="rect">
             <a:avLst/>
@@ -6942,14 +6960,14 @@
           </a:fontRef>
         </p:style>
         <p:txBody>
-          <a:bodyPr rtlCol="0" anchor="ctr" wrap="none" lIns="0" rIns="0" tIns="0" bIns="0">
+          <a:bodyPr rtlCol="0" anchor="ctr" wrap="none" lIns="22860" rIns="22860" tIns="0" bIns="0">
             <a:noAutofit/>
           </a:bodyPr>
           <a:lstStyle/>
           <a:p>
             <a:pPr algn="ctr">
               <a:lnSpc>
-                <a:spcPts val="997"/>
+                <a:spcPts val="1022"/>
               </a:lnSpc>
               <a:spcBef>
                 <a:spcPts val="0"/>
@@ -6978,8 +6996,8 @@
         </p:nvSpPr>
         <p:spPr>
           <a:xfrm>
-            <a:off x="3513328" y="4216466"/>
-            <a:ext cx="819404" cy="154122"/>
+            <a:off x="3513328" y="4236546"/>
+            <a:ext cx="819404" cy="157289"/>
           </a:xfrm>
           <a:prstGeom prst="rect">
             <a:avLst/>
@@ -7009,14 +7027,14 @@
           </a:fontRef>
         </p:style>
         <p:txBody>
-          <a:bodyPr rtlCol="0" anchor="ctr" wrap="none" lIns="0" rIns="0" tIns="0" bIns="0">
+          <a:bodyPr rtlCol="0" anchor="ctr" wrap="none" lIns="22860" rIns="22860" tIns="0" bIns="0">
             <a:noAutofit/>
           </a:bodyPr>
           <a:lstStyle/>
           <a:p>
             <a:pPr algn="ctr">
               <a:lnSpc>
-                <a:spcPts val="997"/>
+                <a:spcPts val="1022"/>
               </a:lnSpc>
               <a:spcBef>
                 <a:spcPts val="0"/>
@@ -7045,8 +7063,8 @@
         </p:nvSpPr>
         <p:spPr>
           <a:xfrm>
-            <a:off x="4332732" y="4216466"/>
-            <a:ext cx="819404" cy="154122"/>
+            <a:off x="4332732" y="4236546"/>
+            <a:ext cx="819404" cy="157289"/>
           </a:xfrm>
           <a:prstGeom prst="rect">
             <a:avLst/>
@@ -7076,14 +7094,14 @@
           </a:fontRef>
         </p:style>
         <p:txBody>
-          <a:bodyPr rtlCol="0" anchor="ctr" wrap="none" lIns="0" rIns="0" tIns="0" bIns="0">
+          <a:bodyPr rtlCol="0" anchor="ctr" wrap="none" lIns="22860" rIns="22860" tIns="0" bIns="0">
             <a:noAutofit/>
           </a:bodyPr>
           <a:lstStyle/>
           <a:p>
             <a:pPr algn="ctr">
               <a:lnSpc>
-                <a:spcPts val="997"/>
+                <a:spcPts val="1022"/>
               </a:lnSpc>
               <a:spcBef>
                 <a:spcPts val="0"/>
@@ -7112,8 +7130,8 @@
         </p:nvSpPr>
         <p:spPr>
           <a:xfrm>
-            <a:off x="1874520" y="4370588"/>
-            <a:ext cx="819404" cy="154122"/>
+            <a:off x="1874520" y="4393835"/>
+            <a:ext cx="819404" cy="157289"/>
           </a:xfrm>
           <a:prstGeom prst="rect">
             <a:avLst/>
@@ -7143,14 +7161,14 @@
           </a:fontRef>
         </p:style>
         <p:txBody>
-          <a:bodyPr rtlCol="0" anchor="ctr" wrap="none" lIns="0" rIns="0" tIns="0" bIns="0">
+          <a:bodyPr rtlCol="0" anchor="ctr" wrap="none" lIns="22860" rIns="22860" tIns="0" bIns="0">
             <a:noAutofit/>
           </a:bodyPr>
           <a:lstStyle/>
           <a:p>
             <a:pPr algn="ctr">
               <a:lnSpc>
-                <a:spcPts val="997"/>
+                <a:spcPts val="1022"/>
               </a:lnSpc>
               <a:spcBef>
                 <a:spcPts val="0"/>
@@ -7179,8 +7197,8 @@
         </p:nvSpPr>
         <p:spPr>
           <a:xfrm>
-            <a:off x="2693924" y="4370588"/>
-            <a:ext cx="819404" cy="154122"/>
+            <a:off x="2693924" y="4393835"/>
+            <a:ext cx="819404" cy="157289"/>
           </a:xfrm>
           <a:prstGeom prst="rect">
             <a:avLst/>
@@ -7210,14 +7228,14 @@
           </a:fontRef>
         </p:style>
         <p:txBody>
-          <a:bodyPr rtlCol="0" anchor="ctr" wrap="none" lIns="0" rIns="0" tIns="0" bIns="0">
+          <a:bodyPr rtlCol="0" anchor="ctr" wrap="none" lIns="22860" rIns="22860" tIns="0" bIns="0">
             <a:noAutofit/>
           </a:bodyPr>
           <a:lstStyle/>
           <a:p>
             <a:pPr algn="ctr">
               <a:lnSpc>
-                <a:spcPts val="997"/>
+                <a:spcPts val="1022"/>
               </a:lnSpc>
               <a:spcBef>
                 <a:spcPts val="0"/>
@@ -7246,8 +7264,8 @@
         </p:nvSpPr>
         <p:spPr>
           <a:xfrm>
-            <a:off x="3513328" y="4370588"/>
-            <a:ext cx="819404" cy="154122"/>
+            <a:off x="3513328" y="4393835"/>
+            <a:ext cx="819404" cy="157289"/>
           </a:xfrm>
           <a:prstGeom prst="rect">
             <a:avLst/>
@@ -7277,14 +7295,14 @@
           </a:fontRef>
         </p:style>
         <p:txBody>
-          <a:bodyPr rtlCol="0" anchor="ctr" wrap="none" lIns="0" rIns="0" tIns="0" bIns="0">
+          <a:bodyPr rtlCol="0" anchor="ctr" wrap="none" lIns="22860" rIns="22860" tIns="0" bIns="0">
             <a:noAutofit/>
           </a:bodyPr>
           <a:lstStyle/>
           <a:p>
             <a:pPr algn="ctr">
               <a:lnSpc>
-                <a:spcPts val="997"/>
+                <a:spcPts val="1022"/>
               </a:lnSpc>
               <a:spcBef>
                 <a:spcPts val="0"/>
@@ -7313,8 +7331,8 @@
         </p:nvSpPr>
         <p:spPr>
           <a:xfrm>
-            <a:off x="4332732" y="4370588"/>
-            <a:ext cx="819404" cy="154122"/>
+            <a:off x="4332732" y="4393835"/>
+            <a:ext cx="819404" cy="157289"/>
           </a:xfrm>
           <a:prstGeom prst="rect">
             <a:avLst/>
@@ -7344,14 +7362,14 @@
           </a:fontRef>
         </p:style>
         <p:txBody>
-          <a:bodyPr rtlCol="0" anchor="ctr" wrap="none" lIns="0" rIns="0" tIns="0" bIns="0">
+          <a:bodyPr rtlCol="0" anchor="ctr" wrap="none" lIns="22860" rIns="22860" tIns="0" bIns="0">
             <a:noAutofit/>
           </a:bodyPr>
           <a:lstStyle/>
           <a:p>
             <a:pPr algn="ctr">
               <a:lnSpc>
-                <a:spcPts val="997"/>
+                <a:spcPts val="1022"/>
               </a:lnSpc>
               <a:spcBef>
                 <a:spcPts val="0"/>
@@ -7367,7 +7385,16 @@
                 </a:solidFill>
                 <a:latin typeface="Segoe UI"/>
               </a:rPr>
-              <a:t>+ 4</a:t>
+              <a:t>+ </a:t>
+            </a:r>
+            <a:r>
+              <a:rPr sz="750" b="0" i="0">
+                <a:solidFill>
+                  <a:srgbClr val="3F3F3F"/>
+                </a:solidFill>
+                <a:latin typeface="Segoe UI"/>
+              </a:rPr>
+              <a:t>4</a:t>
             </a:r>
           </a:p>
         </p:txBody>
@@ -7380,8 +7407,8 @@
         </p:nvSpPr>
         <p:spPr>
           <a:xfrm>
-            <a:off x="5188712" y="3908222"/>
-            <a:ext cx="819404" cy="154122"/>
+            <a:off x="5188712" y="3921968"/>
+            <a:ext cx="819404" cy="157289"/>
           </a:xfrm>
           <a:prstGeom prst="rect">
             <a:avLst/>
@@ -7411,14 +7438,14 @@
           </a:fontRef>
         </p:style>
         <p:txBody>
-          <a:bodyPr rtlCol="0" anchor="ctr" wrap="none" lIns="0" rIns="0" tIns="0" bIns="0">
+          <a:bodyPr rtlCol="0" anchor="ctr" wrap="none" lIns="22860" rIns="22860" tIns="0" bIns="0">
             <a:noAutofit/>
           </a:bodyPr>
           <a:lstStyle/>
           <a:p>
             <a:pPr algn="ctr">
               <a:lnSpc>
-                <a:spcPts val="997"/>
+                <a:spcPts val="1022"/>
               </a:lnSpc>
               <a:spcBef>
                 <a:spcPts val="0"/>
@@ -7447,8 +7474,8 @@
         </p:nvSpPr>
         <p:spPr>
           <a:xfrm>
-            <a:off x="6008116" y="3908222"/>
-            <a:ext cx="819404" cy="154122"/>
+            <a:off x="6008116" y="3921968"/>
+            <a:ext cx="819404" cy="157289"/>
           </a:xfrm>
           <a:prstGeom prst="rect">
             <a:avLst/>
@@ -7478,14 +7505,14 @@
           </a:fontRef>
         </p:style>
         <p:txBody>
-          <a:bodyPr rtlCol="0" anchor="ctr" wrap="none" lIns="0" rIns="0" tIns="0" bIns="0">
+          <a:bodyPr rtlCol="0" anchor="ctr" wrap="none" lIns="22860" rIns="22860" tIns="0" bIns="0">
             <a:noAutofit/>
           </a:bodyPr>
           <a:lstStyle/>
           <a:p>
             <a:pPr algn="ctr">
               <a:lnSpc>
-                <a:spcPts val="997"/>
+                <a:spcPts val="1022"/>
               </a:lnSpc>
               <a:spcBef>
                 <a:spcPts val="0"/>
@@ -7514,8 +7541,8 @@
         </p:nvSpPr>
         <p:spPr>
           <a:xfrm>
-            <a:off x="6827520" y="3908222"/>
-            <a:ext cx="819404" cy="154122"/>
+            <a:off x="6827520" y="3921968"/>
+            <a:ext cx="819404" cy="157289"/>
           </a:xfrm>
           <a:prstGeom prst="rect">
             <a:avLst/>
@@ -7545,14 +7572,14 @@
           </a:fontRef>
         </p:style>
         <p:txBody>
-          <a:bodyPr rtlCol="0" anchor="ctr" wrap="none" lIns="0" rIns="0" tIns="0" bIns="0">
+          <a:bodyPr rtlCol="0" anchor="ctr" wrap="none" lIns="22860" rIns="22860" tIns="0" bIns="0">
             <a:noAutofit/>
           </a:bodyPr>
           <a:lstStyle/>
           <a:p>
             <a:pPr algn="ctr">
               <a:lnSpc>
-                <a:spcPts val="997"/>
+                <a:spcPts val="1022"/>
               </a:lnSpc>
               <a:spcBef>
                 <a:spcPts val="0"/>
@@ -7568,7 +7595,16 @@
                 </a:solidFill>
                 <a:latin typeface="Segoe UI"/>
               </a:rPr>
-              <a:t>State Avg.</a:t>
+              <a:t>State </a:t>
+            </a:r>
+            <a:r>
+              <a:rPr sz="750" b="1" i="0">
+                <a:solidFill>
+                  <a:srgbClr val="3F3F3F"/>
+                </a:solidFill>
+                <a:latin typeface="Segoe UI"/>
+              </a:rPr>
+              <a:t>Avg.</a:t>
             </a:r>
           </a:p>
         </p:txBody>
@@ -7581,8 +7617,8 @@
         </p:nvSpPr>
         <p:spPr>
           <a:xfrm>
-            <a:off x="7646924" y="3908222"/>
-            <a:ext cx="819404" cy="154122"/>
+            <a:off x="7646924" y="3921968"/>
+            <a:ext cx="819404" cy="157289"/>
           </a:xfrm>
           <a:prstGeom prst="rect">
             <a:avLst/>
@@ -7612,14 +7648,14 @@
           </a:fontRef>
         </p:style>
         <p:txBody>
-          <a:bodyPr rtlCol="0" anchor="ctr" wrap="none" lIns="0" rIns="0" tIns="0" bIns="0">
+          <a:bodyPr rtlCol="0" anchor="ctr" wrap="none" lIns="22860" rIns="22860" tIns="0" bIns="0">
             <a:noAutofit/>
           </a:bodyPr>
           <a:lstStyle/>
           <a:p>
             <a:pPr algn="ctr">
               <a:lnSpc>
-                <a:spcPts val="997"/>
+                <a:spcPts val="1022"/>
               </a:lnSpc>
               <a:spcBef>
                 <a:spcPts val="0"/>
@@ -7648,8 +7684,8 @@
         </p:nvSpPr>
         <p:spPr>
           <a:xfrm>
-            <a:off x="5188712" y="4062344"/>
-            <a:ext cx="819404" cy="154122"/>
+            <a:off x="5188712" y="4079257"/>
+            <a:ext cx="819404" cy="157289"/>
           </a:xfrm>
           <a:prstGeom prst="rect">
             <a:avLst/>
@@ -7679,14 +7715,14 @@
           </a:fontRef>
         </p:style>
         <p:txBody>
-          <a:bodyPr rtlCol="0" anchor="ctr" wrap="none" lIns="0" rIns="0" tIns="0" bIns="0">
+          <a:bodyPr rtlCol="0" anchor="ctr" wrap="none" lIns="22860" rIns="22860" tIns="0" bIns="0">
             <a:noAutofit/>
           </a:bodyPr>
           <a:lstStyle/>
           <a:p>
             <a:pPr algn="ctr">
               <a:lnSpc>
-                <a:spcPts val="997"/>
+                <a:spcPts val="1022"/>
               </a:lnSpc>
               <a:spcBef>
                 <a:spcPts val="0"/>
@@ -7715,8 +7751,8 @@
         </p:nvSpPr>
         <p:spPr>
           <a:xfrm>
-            <a:off x="6008116" y="4062344"/>
-            <a:ext cx="819404" cy="154122"/>
+            <a:off x="6008116" y="4079257"/>
+            <a:ext cx="819404" cy="157289"/>
           </a:xfrm>
           <a:prstGeom prst="rect">
             <a:avLst/>
@@ -7746,14 +7782,14 @@
           </a:fontRef>
         </p:style>
         <p:txBody>
-          <a:bodyPr rtlCol="0" anchor="ctr" wrap="none" lIns="0" rIns="0" tIns="0" bIns="0">
+          <a:bodyPr rtlCol="0" anchor="ctr" wrap="none" lIns="22860" rIns="22860" tIns="0" bIns="0">
             <a:noAutofit/>
           </a:bodyPr>
           <a:lstStyle/>
           <a:p>
             <a:pPr algn="ctr">
               <a:lnSpc>
-                <a:spcPts val="997"/>
+                <a:spcPts val="1022"/>
               </a:lnSpc>
               <a:spcBef>
                 <a:spcPts val="0"/>
@@ -7782,8 +7818,8 @@
         </p:nvSpPr>
         <p:spPr>
           <a:xfrm>
-            <a:off x="6827520" y="4062344"/>
-            <a:ext cx="819404" cy="154122"/>
+            <a:off x="6827520" y="4079257"/>
+            <a:ext cx="819404" cy="157289"/>
           </a:xfrm>
           <a:prstGeom prst="rect">
             <a:avLst/>
@@ -7813,14 +7849,14 @@
           </a:fontRef>
         </p:style>
         <p:txBody>
-          <a:bodyPr rtlCol="0" anchor="ctr" wrap="none" lIns="0" rIns="0" tIns="0" bIns="0">
+          <a:bodyPr rtlCol="0" anchor="ctr" wrap="none" lIns="22860" rIns="22860" tIns="0" bIns="0">
             <a:noAutofit/>
           </a:bodyPr>
           <a:lstStyle/>
           <a:p>
             <a:pPr algn="ctr">
               <a:lnSpc>
-                <a:spcPts val="997"/>
+                <a:spcPts val="1022"/>
               </a:lnSpc>
               <a:spcBef>
                 <a:spcPts val="0"/>
@@ -7849,8 +7885,8 @@
         </p:nvSpPr>
         <p:spPr>
           <a:xfrm>
-            <a:off x="7646924" y="4062344"/>
-            <a:ext cx="819404" cy="154122"/>
+            <a:off x="7646924" y="4079257"/>
+            <a:ext cx="819404" cy="157289"/>
           </a:xfrm>
           <a:prstGeom prst="rect">
             <a:avLst/>
@@ -7880,14 +7916,14 @@
           </a:fontRef>
         </p:style>
         <p:txBody>
-          <a:bodyPr rtlCol="0" anchor="ctr" wrap="none" lIns="0" rIns="0" tIns="0" bIns="0">
+          <a:bodyPr rtlCol="0" anchor="ctr" wrap="none" lIns="22860" rIns="22860" tIns="0" bIns="0">
             <a:noAutofit/>
           </a:bodyPr>
           <a:lstStyle/>
           <a:p>
             <a:pPr algn="ctr">
               <a:lnSpc>
-                <a:spcPts val="997"/>
+                <a:spcPts val="1022"/>
               </a:lnSpc>
               <a:spcBef>
                 <a:spcPts val="0"/>
@@ -7916,8 +7952,8 @@
         </p:nvSpPr>
         <p:spPr>
           <a:xfrm>
-            <a:off x="5188712" y="4216466"/>
-            <a:ext cx="819404" cy="154122"/>
+            <a:off x="5188712" y="4236546"/>
+            <a:ext cx="819404" cy="157289"/>
           </a:xfrm>
           <a:prstGeom prst="rect">
             <a:avLst/>
@@ -7947,14 +7983,14 @@
           </a:fontRef>
         </p:style>
         <p:txBody>
-          <a:bodyPr rtlCol="0" anchor="ctr" wrap="none" lIns="0" rIns="0" tIns="0" bIns="0">
+          <a:bodyPr rtlCol="0" anchor="ctr" wrap="none" lIns="22860" rIns="22860" tIns="0" bIns="0">
             <a:noAutofit/>
           </a:bodyPr>
           <a:lstStyle/>
           <a:p>
             <a:pPr algn="ctr">
               <a:lnSpc>
-                <a:spcPts val="997"/>
+                <a:spcPts val="1022"/>
               </a:lnSpc>
               <a:spcBef>
                 <a:spcPts val="0"/>
@@ -7983,8 +8019,8 @@
         </p:nvSpPr>
         <p:spPr>
           <a:xfrm>
-            <a:off x="6008116" y="4216466"/>
-            <a:ext cx="819404" cy="154122"/>
+            <a:off x="6008116" y="4236546"/>
+            <a:ext cx="819404" cy="157289"/>
           </a:xfrm>
           <a:prstGeom prst="rect">
             <a:avLst/>
@@ -8014,14 +8050,14 @@
           </a:fontRef>
         </p:style>
         <p:txBody>
-          <a:bodyPr rtlCol="0" anchor="ctr" wrap="none" lIns="0" rIns="0" tIns="0" bIns="0">
+          <a:bodyPr rtlCol="0" anchor="ctr" wrap="none" lIns="22860" rIns="22860" tIns="0" bIns="0">
             <a:noAutofit/>
           </a:bodyPr>
           <a:lstStyle/>
           <a:p>
             <a:pPr algn="ctr">
               <a:lnSpc>
-                <a:spcPts val="997"/>
+                <a:spcPts val="1022"/>
               </a:lnSpc>
               <a:spcBef>
                 <a:spcPts val="0"/>
@@ -8050,8 +8086,8 @@
         </p:nvSpPr>
         <p:spPr>
           <a:xfrm>
-            <a:off x="6827520" y="4216466"/>
-            <a:ext cx="819404" cy="154122"/>
+            <a:off x="6827520" y="4236546"/>
+            <a:ext cx="819404" cy="157289"/>
           </a:xfrm>
           <a:prstGeom prst="rect">
             <a:avLst/>
@@ -8081,14 +8117,14 @@
           </a:fontRef>
         </p:style>
         <p:txBody>
-          <a:bodyPr rtlCol="0" anchor="ctr" wrap="none" lIns="0" rIns="0" tIns="0" bIns="0">
+          <a:bodyPr rtlCol="0" anchor="ctr" wrap="none" lIns="22860" rIns="22860" tIns="0" bIns="0">
             <a:noAutofit/>
           </a:bodyPr>
           <a:lstStyle/>
           <a:p>
             <a:pPr algn="ctr">
               <a:lnSpc>
-                <a:spcPts val="997"/>
+                <a:spcPts val="1022"/>
               </a:lnSpc>
               <a:spcBef>
                 <a:spcPts val="0"/>
@@ -8117,8 +8153,8 @@
         </p:nvSpPr>
         <p:spPr>
           <a:xfrm>
-            <a:off x="7646924" y="4216466"/>
-            <a:ext cx="819404" cy="154122"/>
+            <a:off x="7646924" y="4236546"/>
+            <a:ext cx="819404" cy="157289"/>
           </a:xfrm>
           <a:prstGeom prst="rect">
             <a:avLst/>
@@ -8148,14 +8184,14 @@
           </a:fontRef>
         </p:style>
         <p:txBody>
-          <a:bodyPr rtlCol="0" anchor="ctr" wrap="none" lIns="0" rIns="0" tIns="0" bIns="0">
+          <a:bodyPr rtlCol="0" anchor="ctr" wrap="none" lIns="22860" rIns="22860" tIns="0" bIns="0">
             <a:noAutofit/>
           </a:bodyPr>
           <a:lstStyle/>
           <a:p>
             <a:pPr algn="ctr">
               <a:lnSpc>
-                <a:spcPts val="997"/>
+                <a:spcPts val="1022"/>
               </a:lnSpc>
               <a:spcBef>
                 <a:spcPts val="0"/>
@@ -8184,8 +8220,8 @@
         </p:nvSpPr>
         <p:spPr>
           <a:xfrm>
-            <a:off x="5188712" y="4370588"/>
-            <a:ext cx="819404" cy="154122"/>
+            <a:off x="5188712" y="4393835"/>
+            <a:ext cx="819404" cy="157289"/>
           </a:xfrm>
           <a:prstGeom prst="rect">
             <a:avLst/>
@@ -8215,14 +8251,14 @@
           </a:fontRef>
         </p:style>
         <p:txBody>
-          <a:bodyPr rtlCol="0" anchor="ctr" wrap="none" lIns="0" rIns="0" tIns="0" bIns="0">
+          <a:bodyPr rtlCol="0" anchor="ctr" wrap="none" lIns="22860" rIns="22860" tIns="0" bIns="0">
             <a:noAutofit/>
           </a:bodyPr>
           <a:lstStyle/>
           <a:p>
             <a:pPr algn="ctr">
               <a:lnSpc>
-                <a:spcPts val="997"/>
+                <a:spcPts val="1022"/>
               </a:lnSpc>
               <a:spcBef>
                 <a:spcPts val="0"/>
@@ -8251,8 +8287,8 @@
         </p:nvSpPr>
         <p:spPr>
           <a:xfrm>
-            <a:off x="6008116" y="4370588"/>
-            <a:ext cx="819404" cy="154122"/>
+            <a:off x="6008116" y="4393835"/>
+            <a:ext cx="819404" cy="157289"/>
           </a:xfrm>
           <a:prstGeom prst="rect">
             <a:avLst/>
@@ -8282,14 +8318,14 @@
           </a:fontRef>
         </p:style>
         <p:txBody>
-          <a:bodyPr rtlCol="0" anchor="ctr" wrap="none" lIns="0" rIns="0" tIns="0" bIns="0">
+          <a:bodyPr rtlCol="0" anchor="ctr" wrap="none" lIns="22860" rIns="22860" tIns="0" bIns="0">
             <a:noAutofit/>
           </a:bodyPr>
           <a:lstStyle/>
           <a:p>
             <a:pPr algn="ctr">
               <a:lnSpc>
-                <a:spcPts val="997"/>
+                <a:spcPts val="1022"/>
               </a:lnSpc>
               <a:spcBef>
                 <a:spcPts val="0"/>
@@ -8318,8 +8354,8 @@
         </p:nvSpPr>
         <p:spPr>
           <a:xfrm>
-            <a:off x="6827520" y="4370588"/>
-            <a:ext cx="819404" cy="154122"/>
+            <a:off x="6827520" y="4393835"/>
+            <a:ext cx="819404" cy="157289"/>
           </a:xfrm>
           <a:prstGeom prst="rect">
             <a:avLst/>
@@ -8349,14 +8385,14 @@
           </a:fontRef>
         </p:style>
         <p:txBody>
-          <a:bodyPr rtlCol="0" anchor="ctr" wrap="none" lIns="0" rIns="0" tIns="0" bIns="0">
+          <a:bodyPr rtlCol="0" anchor="ctr" wrap="none" lIns="22860" rIns="22860" tIns="0" bIns="0">
             <a:noAutofit/>
           </a:bodyPr>
           <a:lstStyle/>
           <a:p>
             <a:pPr algn="ctr">
               <a:lnSpc>
-                <a:spcPts val="997"/>
+                <a:spcPts val="1022"/>
               </a:lnSpc>
               <a:spcBef>
                 <a:spcPts val="0"/>
@@ -8385,8 +8421,8 @@
         </p:nvSpPr>
         <p:spPr>
           <a:xfrm>
-            <a:off x="7646924" y="4370588"/>
-            <a:ext cx="819404" cy="154122"/>
+            <a:off x="7646924" y="4393835"/>
+            <a:ext cx="819404" cy="157289"/>
           </a:xfrm>
           <a:prstGeom prst="rect">
             <a:avLst/>
@@ -8416,14 +8452,14 @@
           </a:fontRef>
         </p:style>
         <p:txBody>
-          <a:bodyPr rtlCol="0" anchor="ctr" wrap="none" lIns="0" rIns="0" tIns="0" bIns="0">
+          <a:bodyPr rtlCol="0" anchor="ctr" wrap="none" lIns="22860" rIns="22860" tIns="0" bIns="0">
             <a:noAutofit/>
           </a:bodyPr>
           <a:lstStyle/>
           <a:p>
             <a:pPr algn="ctr">
               <a:lnSpc>
-                <a:spcPts val="997"/>
+                <a:spcPts val="1022"/>
               </a:lnSpc>
               <a:spcBef>
                 <a:spcPts val="0"/>
@@ -8439,7 +8475,16 @@
                 </a:solidFill>
                 <a:latin typeface="Segoe UI"/>
               </a:rPr>
-              <a:t>+ 1</a:t>
+              <a:t>+ </a:t>
+            </a:r>
+            <a:r>
+              <a:rPr sz="750" b="0" i="0">
+                <a:solidFill>
+                  <a:srgbClr val="3F3F3F"/>
+                </a:solidFill>
+                <a:latin typeface="Segoe UI"/>
+              </a:rPr>
+              <a:t>1</a:t>
             </a:r>
           </a:p>
         </p:txBody>
@@ -8452,8 +8497,8 @@
         </p:nvSpPr>
         <p:spPr>
           <a:xfrm>
-            <a:off x="8502904" y="3908222"/>
-            <a:ext cx="819404" cy="154122"/>
+            <a:off x="8502904" y="3921968"/>
+            <a:ext cx="819404" cy="157289"/>
           </a:xfrm>
           <a:prstGeom prst="rect">
             <a:avLst/>
@@ -8483,14 +8528,14 @@
           </a:fontRef>
         </p:style>
         <p:txBody>
-          <a:bodyPr rtlCol="0" anchor="ctr" wrap="none" lIns="0" rIns="0" tIns="0" bIns="0">
+          <a:bodyPr rtlCol="0" anchor="ctr" wrap="none" lIns="22860" rIns="22860" tIns="0" bIns="0">
             <a:noAutofit/>
           </a:bodyPr>
           <a:lstStyle/>
           <a:p>
             <a:pPr algn="ctr">
               <a:lnSpc>
-                <a:spcPts val="997"/>
+                <a:spcPts val="1022"/>
               </a:lnSpc>
               <a:spcBef>
                 <a:spcPts val="0"/>
@@ -8519,8 +8564,8 @@
         </p:nvSpPr>
         <p:spPr>
           <a:xfrm>
-            <a:off x="9322308" y="3908222"/>
-            <a:ext cx="819404" cy="154122"/>
+            <a:off x="9322308" y="3921968"/>
+            <a:ext cx="819404" cy="157289"/>
           </a:xfrm>
           <a:prstGeom prst="rect">
             <a:avLst/>
@@ -8550,14 +8595,14 @@
           </a:fontRef>
         </p:style>
         <p:txBody>
-          <a:bodyPr rtlCol="0" anchor="ctr" wrap="none" lIns="0" rIns="0" tIns="0" bIns="0">
+          <a:bodyPr rtlCol="0" anchor="ctr" wrap="none" lIns="22860" rIns="22860" tIns="0" bIns="0">
             <a:noAutofit/>
           </a:bodyPr>
           <a:lstStyle/>
           <a:p>
             <a:pPr algn="ctr">
               <a:lnSpc>
-                <a:spcPts val="997"/>
+                <a:spcPts val="1022"/>
               </a:lnSpc>
               <a:spcBef>
                 <a:spcPts val="0"/>
@@ -8586,8 +8631,8 @@
         </p:nvSpPr>
         <p:spPr>
           <a:xfrm>
-            <a:off x="10141712" y="3908222"/>
-            <a:ext cx="819404" cy="154122"/>
+            <a:off x="10141712" y="3921968"/>
+            <a:ext cx="819404" cy="157289"/>
           </a:xfrm>
           <a:prstGeom prst="rect">
             <a:avLst/>
@@ -8617,14 +8662,14 @@
           </a:fontRef>
         </p:style>
         <p:txBody>
-          <a:bodyPr rtlCol="0" anchor="ctr" wrap="none" lIns="0" rIns="0" tIns="0" bIns="0">
+          <a:bodyPr rtlCol="0" anchor="ctr" wrap="none" lIns="22860" rIns="22860" tIns="0" bIns="0">
             <a:noAutofit/>
           </a:bodyPr>
           <a:lstStyle/>
           <a:p>
             <a:pPr algn="ctr">
               <a:lnSpc>
-                <a:spcPts val="997"/>
+                <a:spcPts val="1022"/>
               </a:lnSpc>
               <a:spcBef>
                 <a:spcPts val="0"/>
@@ -8640,7 +8685,16 @@
                 </a:solidFill>
                 <a:latin typeface="Segoe UI"/>
               </a:rPr>
-              <a:t>State Avg.</a:t>
+              <a:t>State </a:t>
+            </a:r>
+            <a:r>
+              <a:rPr sz="750" b="1" i="0">
+                <a:solidFill>
+                  <a:srgbClr val="3F3F3F"/>
+                </a:solidFill>
+                <a:latin typeface="Segoe UI"/>
+              </a:rPr>
+              <a:t>Avg.</a:t>
             </a:r>
           </a:p>
         </p:txBody>
@@ -8653,8 +8707,8 @@
         </p:nvSpPr>
         <p:spPr>
           <a:xfrm>
-            <a:off x="10961116" y="3908222"/>
-            <a:ext cx="819404" cy="154122"/>
+            <a:off x="10961116" y="3921968"/>
+            <a:ext cx="819404" cy="157289"/>
           </a:xfrm>
           <a:prstGeom prst="rect">
             <a:avLst/>
@@ -8684,14 +8738,14 @@
           </a:fontRef>
         </p:style>
         <p:txBody>
-          <a:bodyPr rtlCol="0" anchor="ctr" wrap="none" lIns="0" rIns="0" tIns="0" bIns="0">
+          <a:bodyPr rtlCol="0" anchor="ctr" wrap="none" lIns="22860" rIns="22860" tIns="0" bIns="0">
             <a:noAutofit/>
           </a:bodyPr>
           <a:lstStyle/>
           <a:p>
             <a:pPr algn="ctr">
               <a:lnSpc>
-                <a:spcPts val="997"/>
+                <a:spcPts val="1022"/>
               </a:lnSpc>
               <a:spcBef>
                 <a:spcPts val="0"/>
@@ -8720,8 +8774,8 @@
         </p:nvSpPr>
         <p:spPr>
           <a:xfrm>
-            <a:off x="8502904" y="4062344"/>
-            <a:ext cx="819404" cy="154122"/>
+            <a:off x="8502904" y="4079257"/>
+            <a:ext cx="819404" cy="157289"/>
           </a:xfrm>
           <a:prstGeom prst="rect">
             <a:avLst/>
@@ -8751,14 +8805,14 @@
           </a:fontRef>
         </p:style>
         <p:txBody>
-          <a:bodyPr rtlCol="0" anchor="ctr" wrap="none" lIns="0" rIns="0" tIns="0" bIns="0">
+          <a:bodyPr rtlCol="0" anchor="ctr" wrap="none" lIns="22860" rIns="22860" tIns="0" bIns="0">
             <a:noAutofit/>
           </a:bodyPr>
           <a:lstStyle/>
           <a:p>
             <a:pPr algn="ctr">
               <a:lnSpc>
-                <a:spcPts val="997"/>
+                <a:spcPts val="1022"/>
               </a:lnSpc>
               <a:spcBef>
                 <a:spcPts val="0"/>
@@ -8787,8 +8841,8 @@
         </p:nvSpPr>
         <p:spPr>
           <a:xfrm>
-            <a:off x="9322308" y="4062344"/>
-            <a:ext cx="819404" cy="154122"/>
+            <a:off x="9322308" y="4079257"/>
+            <a:ext cx="819404" cy="157289"/>
           </a:xfrm>
           <a:prstGeom prst="rect">
             <a:avLst/>
@@ -8818,14 +8872,14 @@
           </a:fontRef>
         </p:style>
         <p:txBody>
-          <a:bodyPr rtlCol="0" anchor="ctr" wrap="none" lIns="0" rIns="0" tIns="0" bIns="0">
+          <a:bodyPr rtlCol="0" anchor="ctr" wrap="none" lIns="22860" rIns="22860" tIns="0" bIns="0">
             <a:noAutofit/>
           </a:bodyPr>
           <a:lstStyle/>
           <a:p>
             <a:pPr algn="ctr">
               <a:lnSpc>
-                <a:spcPts val="997"/>
+                <a:spcPts val="1022"/>
               </a:lnSpc>
               <a:spcBef>
                 <a:spcPts val="0"/>
@@ -8854,8 +8908,8 @@
         </p:nvSpPr>
         <p:spPr>
           <a:xfrm>
-            <a:off x="10141712" y="4062344"/>
-            <a:ext cx="819404" cy="154122"/>
+            <a:off x="10141712" y="4079257"/>
+            <a:ext cx="819404" cy="157289"/>
           </a:xfrm>
           <a:prstGeom prst="rect">
             <a:avLst/>
@@ -8885,14 +8939,14 @@
           </a:fontRef>
         </p:style>
         <p:txBody>
-          <a:bodyPr rtlCol="0" anchor="ctr" wrap="none" lIns="0" rIns="0" tIns="0" bIns="0">
+          <a:bodyPr rtlCol="0" anchor="ctr" wrap="none" lIns="22860" rIns="22860" tIns="0" bIns="0">
             <a:noAutofit/>
           </a:bodyPr>
           <a:lstStyle/>
           <a:p>
             <a:pPr algn="ctr">
               <a:lnSpc>
-                <a:spcPts val="997"/>
+                <a:spcPts val="1022"/>
               </a:lnSpc>
               <a:spcBef>
                 <a:spcPts val="0"/>
@@ -8921,8 +8975,8 @@
         </p:nvSpPr>
         <p:spPr>
           <a:xfrm>
-            <a:off x="10961116" y="4062344"/>
-            <a:ext cx="819404" cy="154122"/>
+            <a:off x="10961116" y="4079257"/>
+            <a:ext cx="819404" cy="157289"/>
           </a:xfrm>
           <a:prstGeom prst="rect">
             <a:avLst/>
@@ -8952,14 +9006,14 @@
           </a:fontRef>
         </p:style>
         <p:txBody>
-          <a:bodyPr rtlCol="0" anchor="ctr" wrap="none" lIns="0" rIns="0" tIns="0" bIns="0">
+          <a:bodyPr rtlCol="0" anchor="ctr" wrap="none" lIns="22860" rIns="22860" tIns="0" bIns="0">
             <a:noAutofit/>
           </a:bodyPr>
           <a:lstStyle/>
           <a:p>
             <a:pPr algn="ctr">
               <a:lnSpc>
-                <a:spcPts val="997"/>
+                <a:spcPts val="1022"/>
               </a:lnSpc>
               <a:spcBef>
                 <a:spcPts val="0"/>
@@ -8975,7 +9029,16 @@
                 </a:solidFill>
                 <a:latin typeface="Segoe UI"/>
               </a:rPr>
-              <a:t>- 3</a:t>
+              <a:t>- </a:t>
+            </a:r>
+            <a:r>
+              <a:rPr sz="750" b="0" i="0">
+                <a:solidFill>
+                  <a:srgbClr val="3F3F3F"/>
+                </a:solidFill>
+                <a:latin typeface="Segoe UI"/>
+              </a:rPr>
+              <a:t>3</a:t>
             </a:r>
           </a:p>
         </p:txBody>
@@ -8988,8 +9051,8 @@
         </p:nvSpPr>
         <p:spPr>
           <a:xfrm>
-            <a:off x="8502904" y="4216466"/>
-            <a:ext cx="819404" cy="154122"/>
+            <a:off x="8502904" y="4236546"/>
+            <a:ext cx="819404" cy="157289"/>
           </a:xfrm>
           <a:prstGeom prst="rect">
             <a:avLst/>
@@ -9019,14 +9082,14 @@
           </a:fontRef>
         </p:style>
         <p:txBody>
-          <a:bodyPr rtlCol="0" anchor="ctr" wrap="none" lIns="0" rIns="0" tIns="0" bIns="0">
+          <a:bodyPr rtlCol="0" anchor="ctr" wrap="none" lIns="22860" rIns="22860" tIns="0" bIns="0">
             <a:noAutofit/>
           </a:bodyPr>
           <a:lstStyle/>
           <a:p>
             <a:pPr algn="ctr">
               <a:lnSpc>
-                <a:spcPts val="997"/>
+                <a:spcPts val="1022"/>
               </a:lnSpc>
               <a:spcBef>
                 <a:spcPts val="0"/>
@@ -9055,8 +9118,8 @@
         </p:nvSpPr>
         <p:spPr>
           <a:xfrm>
-            <a:off x="9322308" y="4216466"/>
-            <a:ext cx="819404" cy="154122"/>
+            <a:off x="9322308" y="4236546"/>
+            <a:ext cx="819404" cy="157289"/>
           </a:xfrm>
           <a:prstGeom prst="rect">
             <a:avLst/>
@@ -9086,14 +9149,14 @@
           </a:fontRef>
         </p:style>
         <p:txBody>
-          <a:bodyPr rtlCol="0" anchor="ctr" wrap="none" lIns="0" rIns="0" tIns="0" bIns="0">
+          <a:bodyPr rtlCol="0" anchor="ctr" wrap="none" lIns="22860" rIns="22860" tIns="0" bIns="0">
             <a:noAutofit/>
           </a:bodyPr>
           <a:lstStyle/>
           <a:p>
             <a:pPr algn="ctr">
               <a:lnSpc>
-                <a:spcPts val="997"/>
+                <a:spcPts val="1022"/>
               </a:lnSpc>
               <a:spcBef>
                 <a:spcPts val="0"/>
@@ -9122,8 +9185,8 @@
         </p:nvSpPr>
         <p:spPr>
           <a:xfrm>
-            <a:off x="10141712" y="4216466"/>
-            <a:ext cx="819404" cy="154122"/>
+            <a:off x="10141712" y="4236546"/>
+            <a:ext cx="819404" cy="157289"/>
           </a:xfrm>
           <a:prstGeom prst="rect">
             <a:avLst/>
@@ -9153,14 +9216,14 @@
           </a:fontRef>
         </p:style>
         <p:txBody>
-          <a:bodyPr rtlCol="0" anchor="ctr" wrap="none" lIns="0" rIns="0" tIns="0" bIns="0">
+          <a:bodyPr rtlCol="0" anchor="ctr" wrap="none" lIns="22860" rIns="22860" tIns="0" bIns="0">
             <a:noAutofit/>
           </a:bodyPr>
           <a:lstStyle/>
           <a:p>
             <a:pPr algn="ctr">
               <a:lnSpc>
-                <a:spcPts val="997"/>
+                <a:spcPts val="1022"/>
               </a:lnSpc>
               <a:spcBef>
                 <a:spcPts val="0"/>
@@ -9189,8 +9252,8 @@
         </p:nvSpPr>
         <p:spPr>
           <a:xfrm>
-            <a:off x="10961116" y="4216466"/>
-            <a:ext cx="819404" cy="154122"/>
+            <a:off x="10961116" y="4236546"/>
+            <a:ext cx="819404" cy="157289"/>
           </a:xfrm>
           <a:prstGeom prst="rect">
             <a:avLst/>
@@ -9220,14 +9283,14 @@
           </a:fontRef>
         </p:style>
         <p:txBody>
-          <a:bodyPr rtlCol="0" anchor="ctr" wrap="none" lIns="0" rIns="0" tIns="0" bIns="0">
+          <a:bodyPr rtlCol="0" anchor="ctr" wrap="none" lIns="22860" rIns="22860" tIns="0" bIns="0">
             <a:noAutofit/>
           </a:bodyPr>
           <a:lstStyle/>
           <a:p>
             <a:pPr algn="ctr">
               <a:lnSpc>
-                <a:spcPts val="997"/>
+                <a:spcPts val="1022"/>
               </a:lnSpc>
               <a:spcBef>
                 <a:spcPts val="0"/>
@@ -9256,8 +9319,8 @@
         </p:nvSpPr>
         <p:spPr>
           <a:xfrm>
-            <a:off x="8502904" y="4370588"/>
-            <a:ext cx="819404" cy="154122"/>
+            <a:off x="8502904" y="4393835"/>
+            <a:ext cx="819404" cy="157289"/>
           </a:xfrm>
           <a:prstGeom prst="rect">
             <a:avLst/>
@@ -9287,14 +9350,14 @@
           </a:fontRef>
         </p:style>
         <p:txBody>
-          <a:bodyPr rtlCol="0" anchor="ctr" wrap="none" lIns="0" rIns="0" tIns="0" bIns="0">
+          <a:bodyPr rtlCol="0" anchor="ctr" wrap="none" lIns="22860" rIns="22860" tIns="0" bIns="0">
             <a:noAutofit/>
           </a:bodyPr>
           <a:lstStyle/>
           <a:p>
             <a:pPr algn="ctr">
               <a:lnSpc>
-                <a:spcPts val="997"/>
+                <a:spcPts val="1022"/>
               </a:lnSpc>
               <a:spcBef>
                 <a:spcPts val="0"/>
@@ -9323,8 +9386,8 @@
         </p:nvSpPr>
         <p:spPr>
           <a:xfrm>
-            <a:off x="9322308" y="4370588"/>
-            <a:ext cx="819404" cy="154122"/>
+            <a:off x="9322308" y="4393835"/>
+            <a:ext cx="819404" cy="157289"/>
           </a:xfrm>
           <a:prstGeom prst="rect">
             <a:avLst/>
@@ -9354,14 +9417,14 @@
           </a:fontRef>
         </p:style>
         <p:txBody>
-          <a:bodyPr rtlCol="0" anchor="ctr" wrap="none" lIns="0" rIns="0" tIns="0" bIns="0">
+          <a:bodyPr rtlCol="0" anchor="ctr" wrap="none" lIns="22860" rIns="22860" tIns="0" bIns="0">
             <a:noAutofit/>
           </a:bodyPr>
           <a:lstStyle/>
           <a:p>
             <a:pPr algn="ctr">
               <a:lnSpc>
-                <a:spcPts val="997"/>
+                <a:spcPts val="1022"/>
               </a:lnSpc>
               <a:spcBef>
                 <a:spcPts val="0"/>
@@ -9390,8 +9453,8 @@
         </p:nvSpPr>
         <p:spPr>
           <a:xfrm>
-            <a:off x="10141712" y="4370588"/>
-            <a:ext cx="819404" cy="154122"/>
+            <a:off x="10141712" y="4393835"/>
+            <a:ext cx="819404" cy="157289"/>
           </a:xfrm>
           <a:prstGeom prst="rect">
             <a:avLst/>
@@ -9421,14 +9484,14 @@
           </a:fontRef>
         </p:style>
         <p:txBody>
-          <a:bodyPr rtlCol="0" anchor="ctr" wrap="none" lIns="0" rIns="0" tIns="0" bIns="0">
+          <a:bodyPr rtlCol="0" anchor="ctr" wrap="none" lIns="22860" rIns="22860" tIns="0" bIns="0">
             <a:noAutofit/>
           </a:bodyPr>
           <a:lstStyle/>
           <a:p>
             <a:pPr algn="ctr">
               <a:lnSpc>
-                <a:spcPts val="997"/>
+                <a:spcPts val="1022"/>
               </a:lnSpc>
               <a:spcBef>
                 <a:spcPts val="0"/>
@@ -9457,8 +9520,8 @@
         </p:nvSpPr>
         <p:spPr>
           <a:xfrm>
-            <a:off x="10961116" y="4370588"/>
-            <a:ext cx="819404" cy="154122"/>
+            <a:off x="10961116" y="4393835"/>
+            <a:ext cx="819404" cy="157289"/>
           </a:xfrm>
           <a:prstGeom prst="rect">
             <a:avLst/>
@@ -9488,14 +9551,14 @@
           </a:fontRef>
         </p:style>
         <p:txBody>
-          <a:bodyPr rtlCol="0" anchor="ctr" wrap="none" lIns="0" rIns="0" tIns="0" bIns="0">
+          <a:bodyPr rtlCol="0" anchor="ctr" wrap="none" lIns="22860" rIns="22860" tIns="0" bIns="0">
             <a:noAutofit/>
           </a:bodyPr>
           <a:lstStyle/>
           <a:p>
             <a:pPr algn="ctr">
               <a:lnSpc>
-                <a:spcPts val="997"/>
+                <a:spcPts val="1022"/>
               </a:lnSpc>
               <a:spcBef>
                 <a:spcPts val="0"/>
@@ -9511,7 +9574,16 @@
                 </a:solidFill>
                 <a:latin typeface="Segoe UI"/>
               </a:rPr>
-              <a:t>+ 9</a:t>
+              <a:t>+ </a:t>
+            </a:r>
+            <a:r>
+              <a:rPr sz="750" b="0" i="0">
+                <a:solidFill>
+                  <a:srgbClr val="3F3F3F"/>
+                </a:solidFill>
+                <a:latin typeface="Segoe UI"/>
+              </a:rPr>
+              <a:t>9</a:t>
             </a:r>
           </a:p>
         </p:txBody>
@@ -9524,8 +9596,8 @@
         </p:nvCxnSpPr>
         <p:spPr>
           <a:xfrm>
-            <a:off x="5170424" y="1445380"/>
-            <a:ext cx="0" cy="3387574"/>
+            <a:off x="5170424" y="1407816"/>
+            <a:ext cx="0" cy="3457886"/>
           </a:xfrm>
           <a:prstGeom prst="line">
             <a:avLst/>
@@ -9560,8 +9632,8 @@
         </p:nvCxnSpPr>
         <p:spPr>
           <a:xfrm>
-            <a:off x="8484616" y="1445380"/>
-            <a:ext cx="0" cy="3387574"/>
+            <a:off x="8484616" y="1407816"/>
+            <a:ext cx="0" cy="3457886"/>
           </a:xfrm>
           <a:prstGeom prst="line">
             <a:avLst/>
@@ -9596,7 +9668,7 @@
         </p:nvSpPr>
         <p:spPr>
           <a:xfrm>
-            <a:off x="411480" y="5341422"/>
+            <a:off x="411480" y="5338255"/>
             <a:ext cx="11369040" cy="822960"/>
           </a:xfrm>
           <a:prstGeom prst="rect">
@@ -9642,7 +9714,7 @@
         </p:nvSpPr>
         <p:spPr>
           <a:xfrm>
-            <a:off x="1289304" y="5341422"/>
+            <a:off x="1289304" y="5338255"/>
             <a:ext cx="2545080" cy="822960"/>
           </a:xfrm>
           <a:prstGeom prst="rect">
@@ -9658,7 +9730,7 @@
           <a:p>
             <a:pPr algn="ctr">
               <a:lnSpc>
-                <a:spcPts val="1197"/>
+                <a:spcPts val="1227"/>
               </a:lnSpc>
               <a:spcBef>
                 <a:spcPts val="0"/>
@@ -9689,7 +9761,7 @@
           <a:p>
             <a:pPr algn="ctr">
               <a:lnSpc>
-                <a:spcPts val="1197"/>
+                <a:spcPts val="1227"/>
               </a:lnSpc>
               <a:spcBef>
                 <a:spcPts val="0"/>
@@ -9781,7 +9853,7 @@
         </p:nvSpPr>
         <p:spPr>
           <a:xfrm>
-            <a:off x="3907536" y="5341422"/>
+            <a:off x="3907536" y="5338255"/>
             <a:ext cx="2545080" cy="822960"/>
           </a:xfrm>
           <a:prstGeom prst="rect">
@@ -9797,7 +9869,7 @@
           <a:p>
             <a:pPr algn="ctr">
               <a:lnSpc>
-                <a:spcPts val="1197"/>
+                <a:spcPts val="1227"/>
               </a:lnSpc>
               <a:spcBef>
                 <a:spcPts val="0"/>
@@ -9882,7 +9954,7 @@
           <a:p>
             <a:pPr algn="ctr">
               <a:lnSpc>
-                <a:spcPts val="1197"/>
+                <a:spcPts val="1227"/>
               </a:lnSpc>
               <a:spcBef>
                 <a:spcPts val="0"/>
@@ -9920,7 +9992,7 @@
         </p:nvSpPr>
         <p:spPr>
           <a:xfrm>
-            <a:off x="6525768" y="5341422"/>
+            <a:off x="6525768" y="5338255"/>
             <a:ext cx="2545080" cy="822960"/>
           </a:xfrm>
           <a:prstGeom prst="rect">
@@ -9936,7 +10008,7 @@
           <a:p>
             <a:pPr algn="ctr">
               <a:lnSpc>
-                <a:spcPts val="1197"/>
+                <a:spcPts val="1227"/>
               </a:lnSpc>
               <a:spcBef>
                 <a:spcPts val="0"/>
@@ -10003,7 +10075,7 @@
           <a:p>
             <a:pPr algn="ctr">
               <a:lnSpc>
-                <a:spcPts val="1197"/>
+                <a:spcPts val="1227"/>
               </a:lnSpc>
               <a:spcBef>
                 <a:spcPts val="0"/>
@@ -10041,7 +10113,7 @@
         </p:nvSpPr>
         <p:spPr>
           <a:xfrm>
-            <a:off x="9144000" y="5341422"/>
+            <a:off x="9144000" y="5338255"/>
             <a:ext cx="2545080" cy="822960"/>
           </a:xfrm>
           <a:prstGeom prst="rect">
@@ -10057,7 +10129,7 @@
           <a:p>
             <a:pPr algn="ctr">
               <a:lnSpc>
-                <a:spcPts val="1197"/>
+                <a:spcPts val="1227"/>
               </a:lnSpc>
               <a:spcBef>
                 <a:spcPts val="0"/>
@@ -10115,7 +10187,7 @@
           <a:p>
             <a:pPr algn="ctr">
               <a:lnSpc>
-                <a:spcPts val="1197"/>
+                <a:spcPts val="1227"/>
               </a:lnSpc>
               <a:spcBef>
                 <a:spcPts val="0"/>
@@ -10144,7 +10216,7 @@
         </p:nvCxnSpPr>
         <p:spPr>
           <a:xfrm>
-            <a:off x="3870960" y="5387142"/>
+            <a:off x="3870960" y="5383975"/>
             <a:ext cx="0" cy="731520"/>
           </a:xfrm>
           <a:prstGeom prst="line">
@@ -10179,7 +10251,7 @@
         </p:nvCxnSpPr>
         <p:spPr>
           <a:xfrm>
-            <a:off x="6489192" y="5387142"/>
+            <a:off x="6489192" y="5383975"/>
             <a:ext cx="0" cy="731520"/>
           </a:xfrm>
           <a:prstGeom prst="line">
@@ -10214,7 +10286,7 @@
         </p:nvCxnSpPr>
         <p:spPr>
           <a:xfrm>
-            <a:off x="9107424" y="5387142"/>
+            <a:off x="9107424" y="5383975"/>
             <a:ext cx="0" cy="731520"/>
           </a:xfrm>
           <a:prstGeom prst="line">
@@ -10249,7 +10321,7 @@
         </p:nvSpPr>
         <p:spPr>
           <a:xfrm>
-            <a:off x="466344" y="5387142"/>
+            <a:off x="466344" y="5383975"/>
             <a:ext cx="731520" cy="731520"/>
           </a:xfrm>
           <a:prstGeom prst="ellipse">
@@ -10311,7 +10383,7 @@
         </p:nvSpPr>
         <p:spPr>
           <a:xfrm>
-            <a:off x="5603656" y="5286558"/>
+            <a:off x="5603656" y="5283391"/>
             <a:ext cx="984688" cy="109728"/>
           </a:xfrm>
           <a:prstGeom prst="roundRect">
@@ -10375,8 +10447,8 @@
         </p:nvSpPr>
         <p:spPr>
           <a:xfrm>
-            <a:off x="411480" y="6210102"/>
-            <a:ext cx="11369040" cy="126690"/>
+            <a:off x="411480" y="6206935"/>
+            <a:ext cx="11369040" cy="129857"/>
           </a:xfrm>
           <a:prstGeom prst="rect">
             <a:avLst/>
@@ -10391,7 +10463,7 @@
           <a:p>
             <a:pPr algn="l">
               <a:lnSpc>
-                <a:spcPts val="997"/>
+                <a:spcPts val="1022"/>
               </a:lnSpc>
               <a:spcBef>
                 <a:spcPts val="0"/>

--- a/eval/out/gates_slide2.pptx
+++ b/eval/out/gates_slide2.pptx
@@ -10377,7 +10377,7 @@
       </p:sp>
       <p:sp>
         <p:nvSpPr>
-          <p:cNvPr id="102" name="Rounded Rectangle 101"/>
+          <p:cNvPr id="102" name="de:tab"/>
           <p:cNvSpPr/>
           <p:nvPr/>
         </p:nvSpPr>
